--- a/telco-credit/outputs/dcb_slide_fa_styled.pptx
+++ b/telco-credit/outputs/dcb_slide_fa_styled.pptx
@@ -3180,16 +3180,40 @@
           </a:p>
         </p:txBody>
       </p:sp>
+      <p:pic>
+        <p:nvPicPr>
+          <p:cNvPr id="5" name="Picture 4" descr="net_w.png"/>
+          <p:cNvPicPr>
+            <a:picLocks noChangeAspect="1"/>
+          </p:cNvPicPr>
+          <p:nvPr/>
+        </p:nvPicPr>
+        <p:blipFill>
+          <a:blip r:embed="rId2"/>
+          <a:stretch>
+            <a:fillRect/>
+          </a:stretch>
+        </p:blipFill>
+        <p:spPr>
+          <a:xfrm>
+            <a:off x="570271" y="279400"/>
+            <a:ext cx="180258" cy="203200"/>
+          </a:xfrm>
+          <a:prstGeom prst="rect">
+            <a:avLst/>
+          </a:prstGeom>
+        </p:spPr>
+      </p:pic>
       <p:sp>
         <p:nvSpPr>
-          <p:cNvPr id="5" name="TextBox 4"/>
+          <p:cNvPr id="6" name="TextBox 5"/>
           <p:cNvSpPr txBox="1"/>
           <p:nvPr/>
         </p:nvSpPr>
         <p:spPr>
           <a:xfrm>
             <a:off x="482600" y="203200"/>
-            <a:ext cx="2413000" cy="355600"/>
+            <a:ext cx="2133600" cy="355600"/>
           </a:xfrm>
           <a:prstGeom prst="rect">
             <a:avLst/>
@@ -3203,17 +3227,6 @@
           <a:lstStyle/>
           <a:p>
             <a:pPr rtl="1" algn="r"/>
-            <a:r>
-              <a:rPr sz="1000" b="0" lang="fa-IR">
-                <a:solidFill>
-                  <a:srgbClr val="FFFFFF"/>
-                </a:solidFill>
-                <a:latin typeface="Segoe UI Emoji"/>
-                <a:cs typeface="Segoe UI Emoji"/>
-                <a:ea typeface="Segoe UI Emoji"/>
-              </a:rPr>
-              <a:t>🏦  </a:t>
-            </a:r>
             <a:r>
               <a:rPr sz="1200" b="1" lang="fa-IR">
                 <a:solidFill>
@@ -3241,7 +3254,7 @@
       </p:sp>
       <p:sp>
         <p:nvSpPr>
-          <p:cNvPr id="6" name="TextBox 5"/>
+          <p:cNvPr id="7" name="TextBox 6"/>
           <p:cNvSpPr txBox="1"/>
           <p:nvPr/>
         </p:nvSpPr>
@@ -3278,7 +3291,7 @@
       </p:sp>
       <p:sp>
         <p:nvSpPr>
-          <p:cNvPr id="7" name="TextBox 6"/>
+          <p:cNvPr id="8" name="TextBox 7"/>
           <p:cNvSpPr txBox="1"/>
           <p:nvPr/>
         </p:nvSpPr>
@@ -3315,7 +3328,7 @@
       </p:sp>
       <p:sp>
         <p:nvSpPr>
-          <p:cNvPr id="8" name="Rounded Rectangle 7"/>
+          <p:cNvPr id="9" name="Rounded Rectangle 8"/>
           <p:cNvSpPr/>
           <p:nvPr/>
         </p:nvSpPr>
@@ -3349,7 +3362,7 @@
       </p:sp>
       <p:sp>
         <p:nvSpPr>
-          <p:cNvPr id="9" name="Oval 8"/>
+          <p:cNvPr id="10" name="Oval 9"/>
           <p:cNvSpPr/>
           <p:nvPr/>
         </p:nvSpPr>
@@ -3379,7 +3392,7 @@
       </p:sp>
       <p:sp>
         <p:nvSpPr>
-          <p:cNvPr id="10" name="TextBox 9"/>
+          <p:cNvPr id="11" name="TextBox 10"/>
           <p:cNvSpPr txBox="1"/>
           <p:nvPr/>
         </p:nvSpPr>
@@ -3416,7 +3429,7 @@
       </p:sp>
       <p:sp>
         <p:nvSpPr>
-          <p:cNvPr id="11" name="Oval 10"/>
+          <p:cNvPr id="12" name="Oval 11"/>
           <p:cNvSpPr/>
           <p:nvPr/>
         </p:nvSpPr>
@@ -3446,46 +3459,33 @@
           </a:p>
         </p:txBody>
       </p:sp>
-      <p:sp>
-        <p:nvSpPr>
-          <p:cNvPr id="12" name="TextBox 11"/>
-          <p:cNvSpPr txBox="1"/>
+      <p:pic>
+        <p:nvPicPr>
+          <p:cNvPr id="13" name="Picture 12" descr="screen.png"/>
+          <p:cNvPicPr>
+            <a:picLocks noChangeAspect="1"/>
+          </p:cNvPicPr>
           <p:nvPr/>
-        </p:nvSpPr>
+        </p:nvPicPr>
+        <p:blipFill>
+          <a:blip r:embed="rId3"/>
+          <a:stretch>
+            <a:fillRect/>
+          </a:stretch>
+        </p:blipFill>
         <p:spPr>
           <a:xfrm>
-            <a:off x="8225367" y="1092200"/>
-            <a:ext cx="330200" cy="330200"/>
+            <a:off x="8295217" y="1162050"/>
+            <a:ext cx="190500" cy="190500"/>
           </a:xfrm>
           <a:prstGeom prst="rect">
             <a:avLst/>
           </a:prstGeom>
-          <a:noFill/>
         </p:spPr>
-        <p:txBody>
-          <a:bodyPr wrap="none" lIns="0" rIns="0" tIns="0" bIns="0" anchor="ctr">
-            <a:noAutofit/>
-          </a:bodyPr>
-          <a:lstStyle/>
-          <a:p>
-            <a:pPr rtl="1" algn="ctr"/>
-            <a:r>
-              <a:rPr sz="1100" b="0" lang="fa-IR">
-                <a:solidFill>
-                  <a:srgbClr val="0D67C1"/>
-                </a:solidFill>
-                <a:latin typeface="Segoe UI Emoji"/>
-                <a:cs typeface="Segoe UI Emoji"/>
-                <a:ea typeface="Segoe UI Emoji"/>
-              </a:rPr>
-              <a:t>🔎</a:t>
-            </a:r>
-          </a:p>
-        </p:txBody>
-      </p:sp>
+      </p:pic>
       <p:sp>
         <p:nvSpPr>
-          <p:cNvPr id="13" name="TextBox 12"/>
+          <p:cNvPr id="14" name="TextBox 13"/>
           <p:cNvSpPr txBox="1"/>
           <p:nvPr/>
         </p:nvSpPr>
@@ -3522,7 +3522,7 @@
       </p:sp>
       <p:sp>
         <p:nvSpPr>
-          <p:cNvPr id="14" name="TextBox 13"/>
+          <p:cNvPr id="15" name="TextBox 14"/>
           <p:cNvSpPr txBox="1"/>
           <p:nvPr/>
         </p:nvSpPr>
@@ -3563,7 +3563,7 @@
       </p:sp>
       <p:sp>
         <p:nvSpPr>
-          <p:cNvPr id="15" name="Rounded Rectangle 14"/>
+          <p:cNvPr id="16" name="Rounded Rectangle 15"/>
           <p:cNvSpPr/>
           <p:nvPr/>
         </p:nvSpPr>
@@ -3595,7 +3595,7 @@
       </p:sp>
       <p:sp>
         <p:nvSpPr>
-          <p:cNvPr id="16" name="TextBox 15"/>
+          <p:cNvPr id="17" name="TextBox 16"/>
           <p:cNvSpPr txBox="1"/>
           <p:nvPr/>
         </p:nvSpPr>
@@ -3632,7 +3632,7 @@
       </p:sp>
       <p:sp>
         <p:nvSpPr>
-          <p:cNvPr id="17" name="Rounded Rectangle 16"/>
+          <p:cNvPr id="18" name="Rounded Rectangle 17"/>
           <p:cNvSpPr/>
           <p:nvPr/>
         </p:nvSpPr>
@@ -3664,7 +3664,7 @@
       </p:sp>
       <p:sp>
         <p:nvSpPr>
-          <p:cNvPr id="18" name="TextBox 17"/>
+          <p:cNvPr id="19" name="TextBox 18"/>
           <p:cNvSpPr txBox="1"/>
           <p:nvPr/>
         </p:nvSpPr>
@@ -3701,7 +3701,7 @@
       </p:sp>
       <p:sp>
         <p:nvSpPr>
-          <p:cNvPr id="19" name="Rounded Rectangle 18"/>
+          <p:cNvPr id="20" name="Rounded Rectangle 19"/>
           <p:cNvSpPr/>
           <p:nvPr/>
         </p:nvSpPr>
@@ -3733,7 +3733,7 @@
       </p:sp>
       <p:sp>
         <p:nvSpPr>
-          <p:cNvPr id="20" name="TextBox 19"/>
+          <p:cNvPr id="21" name="TextBox 20"/>
           <p:cNvSpPr txBox="1"/>
           <p:nvPr/>
         </p:nvSpPr>
@@ -3770,7 +3770,7 @@
       </p:sp>
       <p:sp>
         <p:nvSpPr>
-          <p:cNvPr id="21" name="Rounded Rectangle 20"/>
+          <p:cNvPr id="22" name="Rounded Rectangle 21"/>
           <p:cNvSpPr/>
           <p:nvPr/>
         </p:nvSpPr>
@@ -3804,7 +3804,7 @@
       </p:sp>
       <p:sp>
         <p:nvSpPr>
-          <p:cNvPr id="22" name="Oval 21"/>
+          <p:cNvPr id="23" name="Oval 22"/>
           <p:cNvSpPr/>
           <p:nvPr/>
         </p:nvSpPr>
@@ -3834,7 +3834,7 @@
       </p:sp>
       <p:sp>
         <p:nvSpPr>
-          <p:cNvPr id="23" name="TextBox 22"/>
+          <p:cNvPr id="24" name="TextBox 23"/>
           <p:cNvSpPr txBox="1"/>
           <p:nvPr/>
         </p:nvSpPr>
@@ -3871,7 +3871,7 @@
       </p:sp>
       <p:sp>
         <p:nvSpPr>
-          <p:cNvPr id="24" name="Oval 23"/>
+          <p:cNvPr id="25" name="Oval 24"/>
           <p:cNvSpPr/>
           <p:nvPr/>
         </p:nvSpPr>
@@ -3901,46 +3901,33 @@
           </a:p>
         </p:txBody>
       </p:sp>
-      <p:sp>
-        <p:nvSpPr>
-          <p:cNvPr id="25" name="TextBox 24"/>
-          <p:cNvSpPr txBox="1"/>
+      <p:pic>
+        <p:nvPicPr>
+          <p:cNvPr id="26" name="Picture 25" descr="brain.png"/>
+          <p:cNvPicPr>
+            <a:picLocks noChangeAspect="1"/>
+          </p:cNvPicPr>
           <p:nvPr/>
-        </p:nvSpPr>
+        </p:nvPicPr>
+        <p:blipFill>
+          <a:blip r:embed="rId4"/>
+          <a:stretch>
+            <a:fillRect/>
+          </a:stretch>
+        </p:blipFill>
         <p:spPr>
           <a:xfrm>
-            <a:off x="4347633" y="1092200"/>
-            <a:ext cx="330200" cy="330200"/>
+            <a:off x="4417483" y="1162050"/>
+            <a:ext cx="190500" cy="190500"/>
           </a:xfrm>
           <a:prstGeom prst="rect">
             <a:avLst/>
           </a:prstGeom>
-          <a:noFill/>
         </p:spPr>
-        <p:txBody>
-          <a:bodyPr wrap="none" lIns="0" rIns="0" tIns="0" bIns="0" anchor="ctr">
-            <a:noAutofit/>
-          </a:bodyPr>
-          <a:lstStyle/>
-          <a:p>
-            <a:pPr rtl="1" algn="ctr"/>
-            <a:r>
-              <a:rPr sz="1100" b="0" lang="fa-IR">
-                <a:solidFill>
-                  <a:srgbClr val="0D67C1"/>
-                </a:solidFill>
-                <a:latin typeface="Segoe UI Emoji"/>
-                <a:cs typeface="Segoe UI Emoji"/>
-                <a:ea typeface="Segoe UI Emoji"/>
-              </a:rPr>
-              <a:t>🧠</a:t>
-            </a:r>
-          </a:p>
-        </p:txBody>
-      </p:sp>
+      </p:pic>
       <p:sp>
         <p:nvSpPr>
-          <p:cNvPr id="26" name="TextBox 25"/>
+          <p:cNvPr id="27" name="TextBox 26"/>
           <p:cNvSpPr txBox="1"/>
           <p:nvPr/>
         </p:nvSpPr>
@@ -3977,7 +3964,7 @@
       </p:sp>
       <p:sp>
         <p:nvSpPr>
-          <p:cNvPr id="27" name="TextBox 26"/>
+          <p:cNvPr id="28" name="TextBox 27"/>
           <p:cNvSpPr txBox="1"/>
           <p:nvPr/>
         </p:nvSpPr>
@@ -4018,7 +4005,7 @@
       </p:sp>
       <p:sp>
         <p:nvSpPr>
-          <p:cNvPr id="28" name="Rounded Rectangle 27"/>
+          <p:cNvPr id="29" name="Rounded Rectangle 28"/>
           <p:cNvSpPr/>
           <p:nvPr/>
         </p:nvSpPr>
@@ -4050,7 +4037,7 @@
       </p:sp>
       <p:sp>
         <p:nvSpPr>
-          <p:cNvPr id="29" name="TextBox 28"/>
+          <p:cNvPr id="30" name="TextBox 29"/>
           <p:cNvSpPr txBox="1"/>
           <p:nvPr/>
         </p:nvSpPr>
@@ -4087,7 +4074,7 @@
       </p:sp>
       <p:sp>
         <p:nvSpPr>
-          <p:cNvPr id="30" name="Rounded Rectangle 29"/>
+          <p:cNvPr id="31" name="Rounded Rectangle 30"/>
           <p:cNvSpPr/>
           <p:nvPr/>
         </p:nvSpPr>
@@ -4119,7 +4106,7 @@
       </p:sp>
       <p:sp>
         <p:nvSpPr>
-          <p:cNvPr id="31" name="TextBox 30"/>
+          <p:cNvPr id="32" name="TextBox 31"/>
           <p:cNvSpPr txBox="1"/>
           <p:nvPr/>
         </p:nvSpPr>
@@ -4156,7 +4143,7 @@
       </p:sp>
       <p:sp>
         <p:nvSpPr>
-          <p:cNvPr id="32" name="Rounded Rectangle 31"/>
+          <p:cNvPr id="33" name="Rounded Rectangle 32"/>
           <p:cNvSpPr/>
           <p:nvPr/>
         </p:nvSpPr>
@@ -4188,7 +4175,7 @@
       </p:sp>
       <p:sp>
         <p:nvSpPr>
-          <p:cNvPr id="33" name="TextBox 32"/>
+          <p:cNvPr id="34" name="TextBox 33"/>
           <p:cNvSpPr txBox="1"/>
           <p:nvPr/>
         </p:nvSpPr>
@@ -4225,7 +4212,7 @@
       </p:sp>
       <p:sp>
         <p:nvSpPr>
-          <p:cNvPr id="34" name="Rounded Rectangle 33"/>
+          <p:cNvPr id="35" name="Rounded Rectangle 34"/>
           <p:cNvSpPr/>
           <p:nvPr/>
         </p:nvSpPr>
@@ -4259,7 +4246,7 @@
       </p:sp>
       <p:sp>
         <p:nvSpPr>
-          <p:cNvPr id="35" name="Oval 34"/>
+          <p:cNvPr id="36" name="Oval 35"/>
           <p:cNvSpPr/>
           <p:nvPr/>
         </p:nvSpPr>
@@ -4289,7 +4276,7 @@
       </p:sp>
       <p:sp>
         <p:nvSpPr>
-          <p:cNvPr id="36" name="TextBox 35"/>
+          <p:cNvPr id="37" name="TextBox 36"/>
           <p:cNvSpPr txBox="1"/>
           <p:nvPr/>
         </p:nvSpPr>
@@ -4326,7 +4313,7 @@
       </p:sp>
       <p:sp>
         <p:nvSpPr>
-          <p:cNvPr id="37" name="Oval 36"/>
+          <p:cNvPr id="38" name="Oval 37"/>
           <p:cNvSpPr/>
           <p:nvPr/>
         </p:nvSpPr>
@@ -4356,46 +4343,33 @@
           </a:p>
         </p:txBody>
       </p:sp>
-      <p:sp>
-        <p:nvSpPr>
-          <p:cNvPr id="38" name="TextBox 37"/>
-          <p:cNvSpPr txBox="1"/>
+      <p:pic>
+        <p:nvPicPr>
+          <p:cNvPr id="39" name="Picture 38" descr="card.png"/>
+          <p:cNvPicPr>
+            <a:picLocks noChangeAspect="1"/>
+          </p:cNvPicPr>
           <p:nvPr/>
-        </p:nvSpPr>
+        </p:nvPicPr>
+        <p:blipFill>
+          <a:blip r:embed="rId5"/>
+          <a:stretch>
+            <a:fillRect/>
+          </a:stretch>
+        </p:blipFill>
         <p:spPr>
           <a:xfrm>
-            <a:off x="469900" y="1092200"/>
-            <a:ext cx="330200" cy="330200"/>
+            <a:off x="533977" y="1162050"/>
+            <a:ext cx="202045" cy="190500"/>
           </a:xfrm>
           <a:prstGeom prst="rect">
             <a:avLst/>
           </a:prstGeom>
-          <a:noFill/>
         </p:spPr>
-        <p:txBody>
-          <a:bodyPr wrap="none" lIns="0" rIns="0" tIns="0" bIns="0" anchor="ctr">
-            <a:noAutofit/>
-          </a:bodyPr>
-          <a:lstStyle/>
-          <a:p>
-            <a:pPr rtl="1" algn="ctr"/>
-            <a:r>
-              <a:rPr sz="1100" b="0" lang="fa-IR">
-                <a:solidFill>
-                  <a:srgbClr val="0D67C1"/>
-                </a:solidFill>
-                <a:latin typeface="Segoe UI Emoji"/>
-                <a:cs typeface="Segoe UI Emoji"/>
-                <a:ea typeface="Segoe UI Emoji"/>
-              </a:rPr>
-              <a:t>🎯</a:t>
-            </a:r>
-          </a:p>
-        </p:txBody>
-      </p:sp>
+      </p:pic>
       <p:sp>
         <p:nvSpPr>
-          <p:cNvPr id="39" name="TextBox 38"/>
+          <p:cNvPr id="40" name="TextBox 39"/>
           <p:cNvSpPr txBox="1"/>
           <p:nvPr/>
         </p:nvSpPr>
@@ -4432,7 +4406,7 @@
       </p:sp>
       <p:sp>
         <p:nvSpPr>
-          <p:cNvPr id="40" name="TextBox 39"/>
+          <p:cNvPr id="41" name="TextBox 40"/>
           <p:cNvSpPr txBox="1"/>
           <p:nvPr/>
         </p:nvSpPr>
@@ -4473,7 +4447,7 @@
       </p:sp>
       <p:sp>
         <p:nvSpPr>
-          <p:cNvPr id="41" name="Rounded Rectangle 40"/>
+          <p:cNvPr id="42" name="Rounded Rectangle 41"/>
           <p:cNvSpPr/>
           <p:nvPr/>
         </p:nvSpPr>
@@ -4505,7 +4479,7 @@
       </p:sp>
       <p:sp>
         <p:nvSpPr>
-          <p:cNvPr id="42" name="TextBox 41"/>
+          <p:cNvPr id="43" name="TextBox 42"/>
           <p:cNvSpPr txBox="1"/>
           <p:nvPr/>
         </p:nvSpPr>
@@ -4542,7 +4516,7 @@
       </p:sp>
       <p:sp>
         <p:nvSpPr>
-          <p:cNvPr id="43" name="Rounded Rectangle 42"/>
+          <p:cNvPr id="44" name="Rounded Rectangle 43"/>
           <p:cNvSpPr/>
           <p:nvPr/>
         </p:nvSpPr>
@@ -4574,7 +4548,7 @@
       </p:sp>
       <p:sp>
         <p:nvSpPr>
-          <p:cNvPr id="44" name="TextBox 43"/>
+          <p:cNvPr id="45" name="TextBox 44"/>
           <p:cNvSpPr txBox="1"/>
           <p:nvPr/>
         </p:nvSpPr>
@@ -4611,7 +4585,7 @@
       </p:sp>
       <p:sp>
         <p:nvSpPr>
-          <p:cNvPr id="45" name="Rounded Rectangle 44"/>
+          <p:cNvPr id="46" name="Rounded Rectangle 45"/>
           <p:cNvSpPr/>
           <p:nvPr/>
         </p:nvSpPr>
@@ -4643,7 +4617,7 @@
       </p:sp>
       <p:sp>
         <p:nvSpPr>
-          <p:cNvPr id="46" name="TextBox 45"/>
+          <p:cNvPr id="47" name="TextBox 46"/>
           <p:cNvSpPr txBox="1"/>
           <p:nvPr/>
         </p:nvSpPr>
@@ -4680,7 +4654,7 @@
       </p:sp>
       <p:graphicFrame>
         <p:nvGraphicFramePr>
-          <p:cNvPr id="47" name="Table 46"/>
+          <p:cNvPr id="48" name="Table 47"/>
           <p:cNvGraphicFramePr>
             <a:graphicFrameLocks noGrp="1"/>
           </p:cNvGraphicFramePr>
@@ -4715,17 +4689,56 @@
                     <a:p>
                       <a:pPr rtl="1" algn="ctr"/>
                       <a:r>
-                        <a:rPr sz="900" b="0" lang="fa-IR">
+                        <a:rPr sz="850" b="1" lang="fa-IR">
                           <a:solidFill>
                             <a:srgbClr val="FFFFFF"/>
                           </a:solidFill>
-                          <a:latin typeface="Segoe UI Emoji"/>
-                          <a:cs typeface="Segoe UI Emoji"/>
-                          <a:ea typeface="Segoe UI Emoji"/>
-                        </a:rPr>
-                        <a:t>🧮</a:t>
-                      </a:r>
-                    </a:p>
+                          <a:latin typeface="IRANSansXFaNum"/>
+                          <a:cs typeface="IRANSansXFaNum"/>
+                          <a:ea typeface="IRANSansXFaNum"/>
+                        </a:rPr>
+                        <a:t>زیان</a:t>
+                      </a:r>
+                    </a:p>
+                    <a:p>
+                      <a:pPr rtl="1" algn="ctr"/>
+                      <a:r>
+                        <a:rPr sz="680" b="0" lang="fa-IR">
+                          <a:solidFill>
+                            <a:srgbClr val="A9C6EA"/>
+                          </a:solidFill>
+                          <a:latin typeface="IRANSansXFaNum"/>
+                          <a:cs typeface="IRANSansXFaNum"/>
+                          <a:ea typeface="IRANSansXFaNum"/>
+                        </a:rPr>
+                        <a:t>میلیارد تومان</a:t>
+                      </a:r>
+                    </a:p>
+                  </a:txBody>
+                  <a:tcPr marT="38100" marR="38100" marB="38100" marL="38100" anchor="b">
+                    <a:lnL w="9525" cap="flat" cmpd="sng" algn="ctr">
+                      <a:noFill/>
+                    </a:lnL>
+                    <a:lnR w="9525" cap="flat" cmpd="sng" algn="ctr">
+                      <a:noFill/>
+                    </a:lnR>
+                    <a:lnT w="9525" cap="flat" cmpd="sng" algn="ctr">
+                      <a:noFill/>
+                    </a:lnT>
+                    <a:lnB w="9525" cap="flat" cmpd="sng" algn="ctr">
+                      <a:noFill/>
+                    </a:lnB>
+                    <a:solidFill>
+                      <a:srgbClr val="114A89"/>
+                    </a:solidFill>
+                  </a:tcPr>
+                </a:tc>
+                <a:tc>
+                  <a:txBody>
+                    <a:bodyPr wrap="square">
+                      <a:noAutofit/>
+                    </a:bodyPr>
+                    <a:lstStyle/>
                     <a:p>
                       <a:pPr rtl="1" algn="ctr"/>
                       <a:r>
@@ -4737,7 +4750,7 @@
                           <a:cs typeface="IRANSansXFaNum"/>
                           <a:ea typeface="IRANSansXFaNum"/>
                         </a:rPr>
-                        <a:t>زیان</a:t>
+                        <a:t>نرخ نکول</a:t>
                       </a:r>
                     </a:p>
                     <a:p>
@@ -4751,11 +4764,64 @@
                           <a:cs typeface="IRANSansXFaNum"/>
                           <a:ea typeface="IRANSansXFaNum"/>
                         </a:rPr>
+                        <a:t>وزن‌دار بر مبلغ</a:t>
+                      </a:r>
+                    </a:p>
+                  </a:txBody>
+                  <a:tcPr marT="38100" marR="38100" marB="38100" marL="38100" anchor="b">
+                    <a:lnL w="9525" cap="flat" cmpd="sng" algn="ctr">
+                      <a:noFill/>
+                    </a:lnL>
+                    <a:lnR w="9525" cap="flat" cmpd="sng" algn="ctr">
+                      <a:noFill/>
+                    </a:lnR>
+                    <a:lnT w="9525" cap="flat" cmpd="sng" algn="ctr">
+                      <a:noFill/>
+                    </a:lnT>
+                    <a:lnB w="9525" cap="flat" cmpd="sng" algn="ctr">
+                      <a:noFill/>
+                    </a:lnB>
+                    <a:solidFill>
+                      <a:srgbClr val="114A89"/>
+                    </a:solidFill>
+                  </a:tcPr>
+                </a:tc>
+                <a:tc>
+                  <a:txBody>
+                    <a:bodyPr wrap="square">
+                      <a:noAutofit/>
+                    </a:bodyPr>
+                    <a:lstStyle/>
+                    <a:p>
+                      <a:pPr rtl="1" algn="ctr"/>
+                      <a:r>
+                        <a:rPr sz="850" b="1" lang="fa-IR">
+                          <a:solidFill>
+                            <a:srgbClr val="FFFFFF"/>
+                          </a:solidFill>
+                          <a:latin typeface="IRANSansXFaNum"/>
+                          <a:cs typeface="IRANSansXFaNum"/>
+                          <a:ea typeface="IRANSansXFaNum"/>
+                        </a:rPr>
+                        <a:t>مبلغ تا پایان سال</a:t>
+                      </a:r>
+                    </a:p>
+                    <a:p>
+                      <a:pPr rtl="1" algn="ctr"/>
+                      <a:r>
+                        <a:rPr sz="680" b="0" lang="fa-IR">
+                          <a:solidFill>
+                            <a:srgbClr val="A9C6EA"/>
+                          </a:solidFill>
+                          <a:latin typeface="IRANSansXFaNum"/>
+                          <a:cs typeface="IRANSansXFaNum"/>
+                          <a:ea typeface="IRANSansXFaNum"/>
+                        </a:rPr>
                         <a:t>میلیارد تومان</a:t>
                       </a:r>
                     </a:p>
                   </a:txBody>
-                  <a:tcPr marT="38100" marR="38100" marB="38100" marL="38100" anchor="ctr">
+                  <a:tcPr marT="38100" marR="38100" marB="38100" marL="38100" anchor="b">
                     <a:lnL w="9525" cap="flat" cmpd="sng" algn="ctr">
                       <a:noFill/>
                     </a:lnL>
@@ -4782,17 +4848,56 @@
                     <a:p>
                       <a:pPr rtl="1" algn="ctr"/>
                       <a:r>
-                        <a:rPr sz="900" b="0" lang="fa-IR">
+                        <a:rPr sz="850" b="1" lang="fa-IR">
                           <a:solidFill>
                             <a:srgbClr val="FFFFFF"/>
                           </a:solidFill>
-                          <a:latin typeface="Segoe UI Emoji"/>
-                          <a:cs typeface="Segoe UI Emoji"/>
-                          <a:ea typeface="Segoe UI Emoji"/>
-                        </a:rPr>
-                        <a:t>📉</a:t>
-                      </a:r>
-                    </a:p>
+                          <a:latin typeface="IRANSansXFaNum"/>
+                          <a:cs typeface="IRANSansXFaNum"/>
+                          <a:ea typeface="IRANSansXFaNum"/>
+                        </a:rPr>
+                        <a:t>ضریب تکرار</a:t>
+                      </a:r>
+                    </a:p>
+                    <a:p>
+                      <a:pPr rtl="1" algn="ctr"/>
+                      <a:r>
+                        <a:rPr sz="680" b="0" lang="fa-IR">
+                          <a:solidFill>
+                            <a:srgbClr val="A9C6EA"/>
+                          </a:solidFill>
+                          <a:latin typeface="IRANSansXFaNum"/>
+                          <a:cs typeface="IRANSansXFaNum"/>
+                          <a:ea typeface="IRANSansXFaNum"/>
+                        </a:rPr>
+                        <a:t>تا اسفند</a:t>
+                      </a:r>
+                    </a:p>
+                  </a:txBody>
+                  <a:tcPr marT="38100" marR="38100" marB="38100" marL="38100" anchor="b">
+                    <a:lnL w="9525" cap="flat" cmpd="sng" algn="ctr">
+                      <a:noFill/>
+                    </a:lnL>
+                    <a:lnR w="9525" cap="flat" cmpd="sng" algn="ctr">
+                      <a:noFill/>
+                    </a:lnR>
+                    <a:lnT w="9525" cap="flat" cmpd="sng" algn="ctr">
+                      <a:noFill/>
+                    </a:lnT>
+                    <a:lnB w="9525" cap="flat" cmpd="sng" algn="ctr">
+                      <a:noFill/>
+                    </a:lnB>
+                    <a:solidFill>
+                      <a:srgbClr val="114A89"/>
+                    </a:solidFill>
+                  </a:tcPr>
+                </a:tc>
+                <a:tc>
+                  <a:txBody>
+                    <a:bodyPr wrap="square">
+                      <a:noAutofit/>
+                    </a:bodyPr>
+                    <a:lstStyle/>
                     <a:p>
                       <a:pPr rtl="1" algn="ctr"/>
                       <a:r>
@@ -4804,7 +4909,7 @@
                           <a:cs typeface="IRANSansXFaNum"/>
                           <a:ea typeface="IRANSansXFaNum"/>
                         </a:rPr>
-                        <a:t>نرخ نکول</a:t>
+                        <a:t>مبلغ هر بار اعطا</a:t>
                       </a:r>
                     </a:p>
                     <a:p>
@@ -4818,11 +4923,11 @@
                           <a:cs typeface="IRANSansXFaNum"/>
                           <a:ea typeface="IRANSansXFaNum"/>
                         </a:rPr>
-                        <a:t>وزن‌دار بر مبلغ</a:t>
-                      </a:r>
-                    </a:p>
-                  </a:txBody>
-                  <a:tcPr marT="38100" marR="38100" marB="38100" marL="38100" anchor="ctr">
+                        <a:t>میلیارد تومان</a:t>
+                      </a:r>
+                    </a:p>
+                  </a:txBody>
+                  <a:tcPr marT="38100" marR="38100" marB="38100" marL="38100" anchor="b">
                     <a:lnL w="9525" cap="flat" cmpd="sng" algn="ctr">
                       <a:noFill/>
                     </a:lnL>
@@ -4849,17 +4954,56 @@
                     <a:p>
                       <a:pPr rtl="1" algn="ctr"/>
                       <a:r>
-                        <a:rPr sz="900" b="0" lang="fa-IR">
+                        <a:rPr sz="850" b="1" lang="fa-IR">
                           <a:solidFill>
                             <a:srgbClr val="FFFFFF"/>
                           </a:solidFill>
-                          <a:latin typeface="Segoe UI Emoji"/>
-                          <a:cs typeface="Segoe UI Emoji"/>
-                          <a:ea typeface="Segoe UI Emoji"/>
-                        </a:rPr>
-                        <a:t>💰</a:t>
-                      </a:r>
-                    </a:p>
+                          <a:latin typeface="IRANSansXFaNum"/>
+                          <a:cs typeface="IRANSansXFaNum"/>
+                          <a:ea typeface="IRANSansXFaNum"/>
+                        </a:rPr>
+                        <a:t>وام‌گیرنده</a:t>
+                      </a:r>
+                    </a:p>
+                    <a:p>
+                      <a:pPr rtl="1" algn="ctr"/>
+                      <a:r>
+                        <a:rPr sz="680" b="0" lang="fa-IR">
+                          <a:solidFill>
+                            <a:srgbClr val="A9C6EA"/>
+                          </a:solidFill>
+                          <a:latin typeface="IRANSansXFaNum"/>
+                          <a:cs typeface="IRANSansXFaNum"/>
+                          <a:ea typeface="IRANSansXFaNum"/>
+                        </a:rPr>
+                        <a:t>نفر</a:t>
+                      </a:r>
+                    </a:p>
+                  </a:txBody>
+                  <a:tcPr marT="38100" marR="38100" marB="38100" marL="38100" anchor="b">
+                    <a:lnL w="9525" cap="flat" cmpd="sng" algn="ctr">
+                      <a:noFill/>
+                    </a:lnL>
+                    <a:lnR w="9525" cap="flat" cmpd="sng" algn="ctr">
+                      <a:noFill/>
+                    </a:lnR>
+                    <a:lnT w="9525" cap="flat" cmpd="sng" algn="ctr">
+                      <a:noFill/>
+                    </a:lnT>
+                    <a:lnB w="9525" cap="flat" cmpd="sng" algn="ctr">
+                      <a:noFill/>
+                    </a:lnB>
+                    <a:solidFill>
+                      <a:srgbClr val="114A89"/>
+                    </a:solidFill>
+                  </a:tcPr>
+                </a:tc>
+                <a:tc>
+                  <a:txBody>
+                    <a:bodyPr wrap="square">
+                      <a:noAutofit/>
+                    </a:bodyPr>
+                    <a:lstStyle/>
                     <a:p>
                       <a:pPr rtl="1" algn="ctr"/>
                       <a:r>
@@ -4871,7 +5015,7 @@
                           <a:cs typeface="IRANSansXFaNum"/>
                           <a:ea typeface="IRANSansXFaNum"/>
                         </a:rPr>
-                        <a:t>مبلغ تا پایان سال</a:t>
+                        <a:t>ضریب نفوذ</a:t>
                       </a:r>
                     </a:p>
                     <a:p>
@@ -4885,11 +5029,11 @@
                           <a:cs typeface="IRANSansXFaNum"/>
                           <a:ea typeface="IRANSansXFaNum"/>
                         </a:rPr>
-                        <a:t>میلیارد تومان</a:t>
-                      </a:r>
-                    </a:p>
-                  </a:txBody>
-                  <a:tcPr marT="38100" marR="38100" marB="38100" marL="38100" anchor="ctr">
+                        <a:t>از باند</a:t>
+                      </a:r>
+                    </a:p>
+                  </a:txBody>
+                  <a:tcPr marT="38100" marR="38100" marB="38100" marL="38100" anchor="b">
                     <a:lnL w="9525" cap="flat" cmpd="sng" algn="ctr">
                       <a:noFill/>
                     </a:lnL>
@@ -4916,17 +5060,56 @@
                     <a:p>
                       <a:pPr rtl="1" algn="ctr"/>
                       <a:r>
-                        <a:rPr sz="900" b="0" lang="fa-IR">
+                        <a:rPr sz="850" b="1" lang="fa-IR">
                           <a:solidFill>
                             <a:srgbClr val="FFFFFF"/>
                           </a:solidFill>
-                          <a:latin typeface="Segoe UI Emoji"/>
-                          <a:cs typeface="Segoe UI Emoji"/>
-                          <a:ea typeface="Segoe UI Emoji"/>
-                        </a:rPr>
-                        <a:t>🔁</a:t>
-                      </a:r>
-                    </a:p>
+                          <a:latin typeface="IRANSansXFaNum"/>
+                          <a:cs typeface="IRANSansXFaNum"/>
+                          <a:ea typeface="IRANSansXFaNum"/>
+                        </a:rPr>
+                        <a:t>مشترکین تأییدشده</a:t>
+                      </a:r>
+                    </a:p>
+                    <a:p>
+                      <a:pPr rtl="1" algn="ctr"/>
+                      <a:r>
+                        <a:rPr sz="680" b="0" lang="fa-IR">
+                          <a:solidFill>
+                            <a:srgbClr val="A9C6EA"/>
+                          </a:solidFill>
+                          <a:latin typeface="IRANSansXFaNum"/>
+                          <a:cs typeface="IRANSansXFaNum"/>
+                          <a:ea typeface="IRANSansXFaNum"/>
+                        </a:rPr>
+                        <a:t>نفر</a:t>
+                      </a:r>
+                    </a:p>
+                  </a:txBody>
+                  <a:tcPr marT="38100" marR="38100" marB="38100" marL="38100" anchor="b">
+                    <a:lnL w="9525" cap="flat" cmpd="sng" algn="ctr">
+                      <a:noFill/>
+                    </a:lnL>
+                    <a:lnR w="9525" cap="flat" cmpd="sng" algn="ctr">
+                      <a:noFill/>
+                    </a:lnR>
+                    <a:lnT w="9525" cap="flat" cmpd="sng" algn="ctr">
+                      <a:noFill/>
+                    </a:lnT>
+                    <a:lnB w="9525" cap="flat" cmpd="sng" algn="ctr">
+                      <a:noFill/>
+                    </a:lnB>
+                    <a:solidFill>
+                      <a:srgbClr val="114A89"/>
+                    </a:solidFill>
+                  </a:tcPr>
+                </a:tc>
+                <a:tc>
+                  <a:txBody>
+                    <a:bodyPr wrap="square">
+                      <a:noAutofit/>
+                    </a:bodyPr>
+                    <a:lstStyle/>
                     <a:p>
                       <a:pPr rtl="1" algn="ctr"/>
                       <a:r>
@@ -4938,346 +5121,11 @@
                           <a:cs typeface="IRANSansXFaNum"/>
                           <a:ea typeface="IRANSansXFaNum"/>
                         </a:rPr>
-                        <a:t>ضریب تکرار</a:t>
-                      </a:r>
-                    </a:p>
-                    <a:p>
-                      <a:pPr rtl="1" algn="ctr"/>
-                      <a:r>
-                        <a:rPr sz="680" b="0" lang="fa-IR">
-                          <a:solidFill>
-                            <a:srgbClr val="A9C6EA"/>
-                          </a:solidFill>
-                          <a:latin typeface="IRANSansXFaNum"/>
-                          <a:cs typeface="IRANSansXFaNum"/>
-                          <a:ea typeface="IRANSansXFaNum"/>
-                        </a:rPr>
-                        <a:t>تا اسفند</a:t>
-                      </a:r>
-                    </a:p>
-                  </a:txBody>
-                  <a:tcPr marT="38100" marR="38100" marB="38100" marL="38100" anchor="ctr">
-                    <a:lnL w="9525" cap="flat" cmpd="sng" algn="ctr">
-                      <a:noFill/>
-                    </a:lnL>
-                    <a:lnR w="9525" cap="flat" cmpd="sng" algn="ctr">
-                      <a:noFill/>
-                    </a:lnR>
-                    <a:lnT w="9525" cap="flat" cmpd="sng" algn="ctr">
-                      <a:noFill/>
-                    </a:lnT>
-                    <a:lnB w="9525" cap="flat" cmpd="sng" algn="ctr">
-                      <a:noFill/>
-                    </a:lnB>
-                    <a:solidFill>
-                      <a:srgbClr val="114A89"/>
-                    </a:solidFill>
-                  </a:tcPr>
-                </a:tc>
-                <a:tc>
-                  <a:txBody>
-                    <a:bodyPr wrap="square">
-                      <a:noAutofit/>
-                    </a:bodyPr>
-                    <a:lstStyle/>
-                    <a:p>
-                      <a:pPr rtl="1" algn="ctr"/>
-                      <a:r>
-                        <a:rPr sz="900" b="0" lang="fa-IR">
-                          <a:solidFill>
-                            <a:srgbClr val="FFFFFF"/>
-                          </a:solidFill>
-                          <a:latin typeface="Segoe UI Emoji"/>
-                          <a:cs typeface="Segoe UI Emoji"/>
-                          <a:ea typeface="Segoe UI Emoji"/>
-                        </a:rPr>
-                        <a:t>🪙</a:t>
-                      </a:r>
-                    </a:p>
-                    <a:p>
-                      <a:pPr rtl="1" algn="ctr"/>
-                      <a:r>
-                        <a:rPr sz="850" b="1" lang="fa-IR">
-                          <a:solidFill>
-                            <a:srgbClr val="FFFFFF"/>
-                          </a:solidFill>
-                          <a:latin typeface="IRANSansXFaNum"/>
-                          <a:cs typeface="IRANSansXFaNum"/>
-                          <a:ea typeface="IRANSansXFaNum"/>
-                        </a:rPr>
-                        <a:t>مبلغ هر بار اعطا</a:t>
-                      </a:r>
-                    </a:p>
-                    <a:p>
-                      <a:pPr rtl="1" algn="ctr"/>
-                      <a:r>
-                        <a:rPr sz="680" b="0" lang="fa-IR">
-                          <a:solidFill>
-                            <a:srgbClr val="A9C6EA"/>
-                          </a:solidFill>
-                          <a:latin typeface="IRANSansXFaNum"/>
-                          <a:cs typeface="IRANSansXFaNum"/>
-                          <a:ea typeface="IRANSansXFaNum"/>
-                        </a:rPr>
-                        <a:t>میلیارد تومان</a:t>
-                      </a:r>
-                    </a:p>
-                  </a:txBody>
-                  <a:tcPr marT="38100" marR="38100" marB="38100" marL="38100" anchor="ctr">
-                    <a:lnL w="9525" cap="flat" cmpd="sng" algn="ctr">
-                      <a:noFill/>
-                    </a:lnL>
-                    <a:lnR w="9525" cap="flat" cmpd="sng" algn="ctr">
-                      <a:noFill/>
-                    </a:lnR>
-                    <a:lnT w="9525" cap="flat" cmpd="sng" algn="ctr">
-                      <a:noFill/>
-                    </a:lnT>
-                    <a:lnB w="9525" cap="flat" cmpd="sng" algn="ctr">
-                      <a:noFill/>
-                    </a:lnB>
-                    <a:solidFill>
-                      <a:srgbClr val="114A89"/>
-                    </a:solidFill>
-                  </a:tcPr>
-                </a:tc>
-                <a:tc>
-                  <a:txBody>
-                    <a:bodyPr wrap="square">
-                      <a:noAutofit/>
-                    </a:bodyPr>
-                    <a:lstStyle/>
-                    <a:p>
-                      <a:pPr rtl="1" algn="ctr"/>
-                      <a:r>
-                        <a:rPr sz="900" b="0" lang="fa-IR">
-                          <a:solidFill>
-                            <a:srgbClr val="FFFFFF"/>
-                          </a:solidFill>
-                          <a:latin typeface="Segoe UI Emoji"/>
-                          <a:cs typeface="Segoe UI Emoji"/>
-                          <a:ea typeface="Segoe UI Emoji"/>
-                        </a:rPr>
-                        <a:t>🧑</a:t>
-                      </a:r>
-                    </a:p>
-                    <a:p>
-                      <a:pPr rtl="1" algn="ctr"/>
-                      <a:r>
-                        <a:rPr sz="850" b="1" lang="fa-IR">
-                          <a:solidFill>
-                            <a:srgbClr val="FFFFFF"/>
-                          </a:solidFill>
-                          <a:latin typeface="IRANSansXFaNum"/>
-                          <a:cs typeface="IRANSansXFaNum"/>
-                          <a:ea typeface="IRANSansXFaNum"/>
-                        </a:rPr>
-                        <a:t>وام‌گیرنده</a:t>
-                      </a:r>
-                    </a:p>
-                    <a:p>
-                      <a:pPr rtl="1" algn="ctr"/>
-                      <a:r>
-                        <a:rPr sz="680" b="0" lang="fa-IR">
-                          <a:solidFill>
-                            <a:srgbClr val="A9C6EA"/>
-                          </a:solidFill>
-                          <a:latin typeface="IRANSansXFaNum"/>
-                          <a:cs typeface="IRANSansXFaNum"/>
-                          <a:ea typeface="IRANSansXFaNum"/>
-                        </a:rPr>
-                        <a:t>نفر</a:t>
-                      </a:r>
-                    </a:p>
-                  </a:txBody>
-                  <a:tcPr marT="38100" marR="38100" marB="38100" marL="38100" anchor="ctr">
-                    <a:lnL w="9525" cap="flat" cmpd="sng" algn="ctr">
-                      <a:noFill/>
-                    </a:lnL>
-                    <a:lnR w="9525" cap="flat" cmpd="sng" algn="ctr">
-                      <a:noFill/>
-                    </a:lnR>
-                    <a:lnT w="9525" cap="flat" cmpd="sng" algn="ctr">
-                      <a:noFill/>
-                    </a:lnT>
-                    <a:lnB w="9525" cap="flat" cmpd="sng" algn="ctr">
-                      <a:noFill/>
-                    </a:lnB>
-                    <a:solidFill>
-                      <a:srgbClr val="114A89"/>
-                    </a:solidFill>
-                  </a:tcPr>
-                </a:tc>
-                <a:tc>
-                  <a:txBody>
-                    <a:bodyPr wrap="square">
-                      <a:noAutofit/>
-                    </a:bodyPr>
-                    <a:lstStyle/>
-                    <a:p>
-                      <a:pPr rtl="1" algn="ctr"/>
-                      <a:r>
-                        <a:rPr sz="900" b="0" lang="fa-IR">
-                          <a:solidFill>
-                            <a:srgbClr val="FFFFFF"/>
-                          </a:solidFill>
-                          <a:latin typeface="Segoe UI Emoji"/>
-                          <a:cs typeface="Segoe UI Emoji"/>
-                          <a:ea typeface="Segoe UI Emoji"/>
-                        </a:rPr>
-                        <a:t>📈</a:t>
-                      </a:r>
-                    </a:p>
-                    <a:p>
-                      <a:pPr rtl="1" algn="ctr"/>
-                      <a:r>
-                        <a:rPr sz="850" b="1" lang="fa-IR">
-                          <a:solidFill>
-                            <a:srgbClr val="FFFFFF"/>
-                          </a:solidFill>
-                          <a:latin typeface="IRANSansXFaNum"/>
-                          <a:cs typeface="IRANSansXFaNum"/>
-                          <a:ea typeface="IRANSansXFaNum"/>
-                        </a:rPr>
-                        <a:t>ضریب نفوذ</a:t>
-                      </a:r>
-                    </a:p>
-                    <a:p>
-                      <a:pPr rtl="1" algn="ctr"/>
-                      <a:r>
-                        <a:rPr sz="680" b="0" lang="fa-IR">
-                          <a:solidFill>
-                            <a:srgbClr val="A9C6EA"/>
-                          </a:solidFill>
-                          <a:latin typeface="IRANSansXFaNum"/>
-                          <a:cs typeface="IRANSansXFaNum"/>
-                          <a:ea typeface="IRANSansXFaNum"/>
-                        </a:rPr>
-                        <a:t>از باند</a:t>
-                      </a:r>
-                    </a:p>
-                  </a:txBody>
-                  <a:tcPr marT="38100" marR="38100" marB="38100" marL="38100" anchor="ctr">
-                    <a:lnL w="9525" cap="flat" cmpd="sng" algn="ctr">
-                      <a:noFill/>
-                    </a:lnL>
-                    <a:lnR w="9525" cap="flat" cmpd="sng" algn="ctr">
-                      <a:noFill/>
-                    </a:lnR>
-                    <a:lnT w="9525" cap="flat" cmpd="sng" algn="ctr">
-                      <a:noFill/>
-                    </a:lnT>
-                    <a:lnB w="9525" cap="flat" cmpd="sng" algn="ctr">
-                      <a:noFill/>
-                    </a:lnB>
-                    <a:solidFill>
-                      <a:srgbClr val="114A89"/>
-                    </a:solidFill>
-                  </a:tcPr>
-                </a:tc>
-                <a:tc>
-                  <a:txBody>
-                    <a:bodyPr wrap="square">
-                      <a:noAutofit/>
-                    </a:bodyPr>
-                    <a:lstStyle/>
-                    <a:p>
-                      <a:pPr rtl="1" algn="ctr"/>
-                      <a:r>
-                        <a:rPr sz="900" b="0" lang="fa-IR">
-                          <a:solidFill>
-                            <a:srgbClr val="FFFFFF"/>
-                          </a:solidFill>
-                          <a:latin typeface="Segoe UI Emoji"/>
-                          <a:cs typeface="Segoe UI Emoji"/>
-                          <a:ea typeface="Segoe UI Emoji"/>
-                        </a:rPr>
-                        <a:t>👥</a:t>
-                      </a:r>
-                    </a:p>
-                    <a:p>
-                      <a:pPr rtl="1" algn="ctr"/>
-                      <a:r>
-                        <a:rPr sz="850" b="1" lang="fa-IR">
-                          <a:solidFill>
-                            <a:srgbClr val="FFFFFF"/>
-                          </a:solidFill>
-                          <a:latin typeface="IRANSansXFaNum"/>
-                          <a:cs typeface="IRANSansXFaNum"/>
-                          <a:ea typeface="IRANSansXFaNum"/>
-                        </a:rPr>
-                        <a:t>مشترکین تأییدشده</a:t>
-                      </a:r>
-                    </a:p>
-                    <a:p>
-                      <a:pPr rtl="1" algn="ctr"/>
-                      <a:r>
-                        <a:rPr sz="680" b="0" lang="fa-IR">
-                          <a:solidFill>
-                            <a:srgbClr val="A9C6EA"/>
-                          </a:solidFill>
-                          <a:latin typeface="IRANSansXFaNum"/>
-                          <a:cs typeface="IRANSansXFaNum"/>
-                          <a:ea typeface="IRANSansXFaNum"/>
-                        </a:rPr>
-                        <a:t>نفر</a:t>
-                      </a:r>
-                    </a:p>
-                  </a:txBody>
-                  <a:tcPr marT="38100" marR="38100" marB="38100" marL="38100" anchor="ctr">
-                    <a:lnL w="9525" cap="flat" cmpd="sng" algn="ctr">
-                      <a:noFill/>
-                    </a:lnL>
-                    <a:lnR w="9525" cap="flat" cmpd="sng" algn="ctr">
-                      <a:noFill/>
-                    </a:lnR>
-                    <a:lnT w="9525" cap="flat" cmpd="sng" algn="ctr">
-                      <a:noFill/>
-                    </a:lnT>
-                    <a:lnB w="9525" cap="flat" cmpd="sng" algn="ctr">
-                      <a:noFill/>
-                    </a:lnB>
-                    <a:solidFill>
-                      <a:srgbClr val="114A89"/>
-                    </a:solidFill>
-                  </a:tcPr>
-                </a:tc>
-                <a:tc>
-                  <a:txBody>
-                    <a:bodyPr wrap="square">
-                      <a:noAutofit/>
-                    </a:bodyPr>
-                    <a:lstStyle/>
-                    <a:p>
-                      <a:pPr rtl="1" algn="ctr"/>
-                      <a:r>
-                        <a:rPr sz="900" b="0" lang="fa-IR">
-                          <a:solidFill>
-                            <a:srgbClr val="FFFFFF"/>
-                          </a:solidFill>
-                          <a:latin typeface="Segoe UI Emoji"/>
-                          <a:cs typeface="Segoe UI Emoji"/>
-                          <a:ea typeface="Segoe UI Emoji"/>
-                        </a:rPr>
-                        <a:t>💳</a:t>
-                      </a:r>
-                    </a:p>
-                    <a:p>
-                      <a:pPr rtl="1" algn="ctr"/>
-                      <a:r>
-                        <a:rPr sz="850" b="1" lang="fa-IR">
-                          <a:solidFill>
-                            <a:srgbClr val="FFFFFF"/>
-                          </a:solidFill>
-                          <a:latin typeface="IRANSansXFaNum"/>
-                          <a:cs typeface="IRANSansXFaNum"/>
-                          <a:ea typeface="IRANSansXFaNum"/>
-                        </a:rPr>
                         <a:t>سقف وام</a:t>
                       </a:r>
                     </a:p>
                   </a:txBody>
-                  <a:tcPr marT="38100" marR="38100" marB="38100" marL="38100" anchor="ctr">
+                  <a:tcPr marT="38100" marR="38100" marB="38100" marL="38100" anchor="b">
                     <a:lnL w="9525" cap="flat" cmpd="sng" algn="ctr">
                       <a:noFill/>
                     </a:lnL>
@@ -5987,17 +5835,6 @@
                     <a:p>
                       <a:pPr rtl="1" algn="r"/>
                       <a:r>
-                        <a:rPr sz="800" b="0" lang="fa-IR">
-                          <a:solidFill>
-                            <a:srgbClr val="0D67C1"/>
-                          </a:solidFill>
-                          <a:latin typeface="Segoe UI Emoji"/>
-                          <a:cs typeface="Segoe UI Emoji"/>
-                          <a:ea typeface="Segoe UI Emoji"/>
-                        </a:rPr>
-                        <a:t>👤  </a:t>
-                      </a:r>
-                      <a:r>
                         <a:rPr sz="750" b="1" lang="fa-IR">
                           <a:solidFill>
                             <a:srgbClr val="0F2F66"/>
@@ -6010,7 +5847,7 @@
                       </a:r>
                     </a:p>
                   </a:txBody>
-                  <a:tcPr marT="12700" marR="127000" marB="12700" marL="76200" anchor="ctr">
+                  <a:tcPr marT="12700" marR="304800" marB="12700" marL="76200" anchor="ctr">
                     <a:lnL w="9525" cap="flat" cmpd="sng" algn="ctr">
                       <a:noFill/>
                     </a:lnL>
@@ -6369,17 +6206,6 @@
                     <a:p>
                       <a:pPr rtl="1" algn="r"/>
                       <a:r>
-                        <a:rPr sz="800" b="0" lang="fa-IR">
-                          <a:solidFill>
-                            <a:srgbClr val="0D67C1"/>
-                          </a:solidFill>
-                          <a:latin typeface="Segoe UI Emoji"/>
-                          <a:cs typeface="Segoe UI Emoji"/>
-                          <a:ea typeface="Segoe UI Emoji"/>
-                        </a:rPr>
-                        <a:t>👤  </a:t>
-                      </a:r>
-                      <a:r>
                         <a:rPr sz="750" b="1" lang="fa-IR">
                           <a:solidFill>
                             <a:srgbClr val="0F2F66"/>
@@ -6392,7 +6218,7 @@
                       </a:r>
                     </a:p>
                   </a:txBody>
-                  <a:tcPr marT="12700" marR="127000" marB="12700" marL="76200" anchor="ctr">
+                  <a:tcPr marT="12700" marR="304800" marB="12700" marL="76200" anchor="ctr">
                     <a:lnL w="9525" cap="flat" cmpd="sng" algn="ctr">
                       <a:noFill/>
                     </a:lnL>
@@ -6751,17 +6577,6 @@
                     <a:p>
                       <a:pPr rtl="1" algn="r"/>
                       <a:r>
-                        <a:rPr sz="800" b="0" lang="fa-IR">
-                          <a:solidFill>
-                            <a:srgbClr val="0D67C1"/>
-                          </a:solidFill>
-                          <a:latin typeface="Segoe UI Emoji"/>
-                          <a:cs typeface="Segoe UI Emoji"/>
-                          <a:ea typeface="Segoe UI Emoji"/>
-                        </a:rPr>
-                        <a:t>👤  </a:t>
-                      </a:r>
-                      <a:r>
                         <a:rPr sz="750" b="1" lang="fa-IR">
                           <a:solidFill>
                             <a:srgbClr val="0F2F66"/>
@@ -6774,7 +6589,7 @@
                       </a:r>
                     </a:p>
                   </a:txBody>
-                  <a:tcPr marT="12700" marR="127000" marB="12700" marL="76200" anchor="ctr">
+                  <a:tcPr marT="12700" marR="304800" marB="12700" marL="76200" anchor="ctr">
                     <a:lnL w="9525" cap="flat" cmpd="sng" algn="ctr">
                       <a:noFill/>
                     </a:lnL>
@@ -7117,21 +6932,10 @@
                     <a:p>
                       <a:pPr rtl="1" algn="r"/>
                       <a:r>
-                        <a:rPr sz="850" b="0" lang="fa-IR">
+                        <a:rPr sz="900" b="1" lang="fa-IR">
                           <a:solidFill>
                             <a:srgbClr val="FFFFFF"/>
                           </a:solidFill>
-                          <a:latin typeface="Segoe UI Emoji"/>
-                          <a:cs typeface="Segoe UI Emoji"/>
-                          <a:ea typeface="Segoe UI Emoji"/>
-                        </a:rPr>
-                        <a:t>🧮  </a:t>
-                      </a:r>
-                      <a:r>
-                        <a:rPr sz="900" b="1" lang="fa-IR">
-                          <a:solidFill>
-                            <a:srgbClr val="FFFFFF"/>
-                          </a:solidFill>
                           <a:latin typeface="IRANSansXFaNum"/>
                           <a:cs typeface="IRANSansXFaNum"/>
                           <a:ea typeface="IRANSansXFaNum"/>
@@ -7140,7 +6944,7 @@
                       </a:r>
                     </a:p>
                   </a:txBody>
-                  <a:tcPr marT="12700" marR="127000" marB="12700" marL="76200" anchor="ctr">
+                  <a:tcPr marT="12700" marR="330200" marB="12700" marL="76200" anchor="ctr">
                     <a:lnL w="9525" cap="flat" cmpd="sng" algn="ctr">
                       <a:noFill/>
                     </a:lnL>
@@ -7850,17 +7654,6 @@
                     <a:p>
                       <a:pPr rtl="1" algn="r"/>
                       <a:r>
-                        <a:rPr sz="800" b="0" lang="fa-IR">
-                          <a:solidFill>
-                            <a:srgbClr val="0D67C1"/>
-                          </a:solidFill>
-                          <a:latin typeface="Segoe UI Emoji"/>
-                          <a:cs typeface="Segoe UI Emoji"/>
-                          <a:ea typeface="Segoe UI Emoji"/>
-                        </a:rPr>
-                        <a:t>👤  </a:t>
-                      </a:r>
-                      <a:r>
                         <a:rPr sz="750" b="1" lang="fa-IR">
                           <a:solidFill>
                             <a:srgbClr val="0F2F66"/>
@@ -7873,7 +7666,7 @@
                       </a:r>
                     </a:p>
                   </a:txBody>
-                  <a:tcPr marT="12700" marR="127000" marB="12700" marL="76200" anchor="ctr">
+                  <a:tcPr marT="12700" marR="304800" marB="12700" marL="76200" anchor="ctr">
                     <a:lnL w="9525" cap="flat" cmpd="sng" algn="ctr">
                       <a:noFill/>
                     </a:lnL>
@@ -8232,17 +8025,6 @@
                     <a:p>
                       <a:pPr rtl="1" algn="r"/>
                       <a:r>
-                        <a:rPr sz="800" b="0" lang="fa-IR">
-                          <a:solidFill>
-                            <a:srgbClr val="0D67C1"/>
-                          </a:solidFill>
-                          <a:latin typeface="Segoe UI Emoji"/>
-                          <a:cs typeface="Segoe UI Emoji"/>
-                          <a:ea typeface="Segoe UI Emoji"/>
-                        </a:rPr>
-                        <a:t>👤  </a:t>
-                      </a:r>
-                      <a:r>
                         <a:rPr sz="750" b="1" lang="fa-IR">
                           <a:solidFill>
                             <a:srgbClr val="0F2F66"/>
@@ -8255,7 +8037,7 @@
                       </a:r>
                     </a:p>
                   </a:txBody>
-                  <a:tcPr marT="12700" marR="127000" marB="12700" marL="76200" anchor="ctr">
+                  <a:tcPr marT="12700" marR="304800" marB="12700" marL="76200" anchor="ctr">
                     <a:lnL w="9525" cap="flat" cmpd="sng" algn="ctr">
                       <a:noFill/>
                     </a:lnL>
@@ -8614,17 +8396,6 @@
                     <a:p>
                       <a:pPr rtl="1" algn="r"/>
                       <a:r>
-                        <a:rPr sz="800" b="0" lang="fa-IR">
-                          <a:solidFill>
-                            <a:srgbClr val="0D67C1"/>
-                          </a:solidFill>
-                          <a:latin typeface="Segoe UI Emoji"/>
-                          <a:cs typeface="Segoe UI Emoji"/>
-                          <a:ea typeface="Segoe UI Emoji"/>
-                        </a:rPr>
-                        <a:t>👤  </a:t>
-                      </a:r>
-                      <a:r>
                         <a:rPr sz="750" b="1" lang="fa-IR">
                           <a:solidFill>
                             <a:srgbClr val="0F2F66"/>
@@ -8637,7 +8408,7 @@
                       </a:r>
                     </a:p>
                   </a:txBody>
-                  <a:tcPr marT="12700" marR="127000" marB="12700" marL="76200" anchor="ctr">
+                  <a:tcPr marT="12700" marR="304800" marB="12700" marL="76200" anchor="ctr">
                     <a:lnL w="9525" cap="flat" cmpd="sng" algn="ctr">
                       <a:noFill/>
                     </a:lnL>
@@ -8980,21 +8751,10 @@
                     <a:p>
                       <a:pPr rtl="1" algn="r"/>
                       <a:r>
-                        <a:rPr sz="850" b="0" lang="fa-IR">
+                        <a:rPr sz="900" b="1" lang="fa-IR">
                           <a:solidFill>
                             <a:srgbClr val="FFFFFF"/>
                           </a:solidFill>
-                          <a:latin typeface="Segoe UI Emoji"/>
-                          <a:cs typeface="Segoe UI Emoji"/>
-                          <a:ea typeface="Segoe UI Emoji"/>
-                        </a:rPr>
-                        <a:t>🧮  </a:t>
-                      </a:r>
-                      <a:r>
-                        <a:rPr sz="900" b="1" lang="fa-IR">
-                          <a:solidFill>
-                            <a:srgbClr val="FFFFFF"/>
-                          </a:solidFill>
                           <a:latin typeface="IRANSansXFaNum"/>
                           <a:cs typeface="IRANSansXFaNum"/>
                           <a:ea typeface="IRANSansXFaNum"/>
@@ -9003,7 +8763,7 @@
                       </a:r>
                     </a:p>
                   </a:txBody>
-                  <a:tcPr marT="12700" marR="127000" marB="12700" marL="76200" anchor="ctr">
+                  <a:tcPr marT="12700" marR="330200" marB="12700" marL="76200" anchor="ctr">
                     <a:lnL w="9525" cap="flat" cmpd="sng" algn="ctr">
                       <a:noFill/>
                     </a:lnL>
@@ -9713,17 +9473,6 @@
                     <a:p>
                       <a:pPr rtl="1" algn="r"/>
                       <a:r>
-                        <a:rPr sz="800" b="0" lang="fa-IR">
-                          <a:solidFill>
-                            <a:srgbClr val="0D67C1"/>
-                          </a:solidFill>
-                          <a:latin typeface="Segoe UI Emoji"/>
-                          <a:cs typeface="Segoe UI Emoji"/>
-                          <a:ea typeface="Segoe UI Emoji"/>
-                        </a:rPr>
-                        <a:t>👤  </a:t>
-                      </a:r>
-                      <a:r>
                         <a:rPr sz="750" b="1" lang="fa-IR">
                           <a:solidFill>
                             <a:srgbClr val="0F2F66"/>
@@ -9736,7 +9485,7 @@
                       </a:r>
                     </a:p>
                   </a:txBody>
-                  <a:tcPr marT="12700" marR="127000" marB="12700" marL="76200" anchor="ctr">
+                  <a:tcPr marT="12700" marR="304800" marB="12700" marL="76200" anchor="ctr">
                     <a:lnL w="9525" cap="flat" cmpd="sng" algn="ctr">
                       <a:noFill/>
                     </a:lnL>
@@ -10095,17 +9844,6 @@
                     <a:p>
                       <a:pPr rtl="1" algn="r"/>
                       <a:r>
-                        <a:rPr sz="800" b="0" lang="fa-IR">
-                          <a:solidFill>
-                            <a:srgbClr val="0D67C1"/>
-                          </a:solidFill>
-                          <a:latin typeface="Segoe UI Emoji"/>
-                          <a:cs typeface="Segoe UI Emoji"/>
-                          <a:ea typeface="Segoe UI Emoji"/>
-                        </a:rPr>
-                        <a:t>👤  </a:t>
-                      </a:r>
-                      <a:r>
                         <a:rPr sz="750" b="1" lang="fa-IR">
                           <a:solidFill>
                             <a:srgbClr val="0F2F66"/>
@@ -10118,7 +9856,7 @@
                       </a:r>
                     </a:p>
                   </a:txBody>
-                  <a:tcPr marT="12700" marR="127000" marB="12700" marL="76200" anchor="ctr">
+                  <a:tcPr marT="12700" marR="304800" marB="12700" marL="76200" anchor="ctr">
                     <a:lnL w="9525" cap="flat" cmpd="sng" algn="ctr">
                       <a:noFill/>
                     </a:lnL>
@@ -10477,17 +10215,6 @@
                     <a:p>
                       <a:pPr rtl="1" algn="r"/>
                       <a:r>
-                        <a:rPr sz="800" b="0" lang="fa-IR">
-                          <a:solidFill>
-                            <a:srgbClr val="0D67C1"/>
-                          </a:solidFill>
-                          <a:latin typeface="Segoe UI Emoji"/>
-                          <a:cs typeface="Segoe UI Emoji"/>
-                          <a:ea typeface="Segoe UI Emoji"/>
-                        </a:rPr>
-                        <a:t>👤  </a:t>
-                      </a:r>
-                      <a:r>
                         <a:rPr sz="750" b="1" lang="fa-IR">
                           <a:solidFill>
                             <a:srgbClr val="0F2F66"/>
@@ -10500,7 +10227,7 @@
                       </a:r>
                     </a:p>
                   </a:txBody>
-                  <a:tcPr marT="12700" marR="127000" marB="12700" marL="76200" anchor="ctr">
+                  <a:tcPr marT="12700" marR="304800" marB="12700" marL="76200" anchor="ctr">
                     <a:lnL w="9525" cap="flat" cmpd="sng" algn="ctr">
                       <a:noFill/>
                     </a:lnL>
@@ -10843,21 +10570,10 @@
                     <a:p>
                       <a:pPr rtl="1" algn="r"/>
                       <a:r>
-                        <a:rPr sz="850" b="0" lang="fa-IR">
+                        <a:rPr sz="900" b="1" lang="fa-IR">
                           <a:solidFill>
                             <a:srgbClr val="FFFFFF"/>
                           </a:solidFill>
-                          <a:latin typeface="Segoe UI Emoji"/>
-                          <a:cs typeface="Segoe UI Emoji"/>
-                          <a:ea typeface="Segoe UI Emoji"/>
-                        </a:rPr>
-                        <a:t>🧮  </a:t>
-                      </a:r>
-                      <a:r>
-                        <a:rPr sz="900" b="1" lang="fa-IR">
-                          <a:solidFill>
-                            <a:srgbClr val="FFFFFF"/>
-                          </a:solidFill>
                           <a:latin typeface="IRANSansXFaNum"/>
                           <a:cs typeface="IRANSansXFaNum"/>
                           <a:ea typeface="IRANSansXFaNum"/>
@@ -10866,7 +10582,7 @@
                       </a:r>
                     </a:p>
                   </a:txBody>
-                  <a:tcPr marT="12700" marR="127000" marB="12700" marL="76200" anchor="ctr">
+                  <a:tcPr marT="12700" marR="330200" marB="12700" marL="76200" anchor="ctr">
                     <a:lnL w="9525" cap="flat" cmpd="sng" algn="ctr">
                       <a:noFill/>
                     </a:lnL>
@@ -10889,9 +10605,513 @@
           </a:graphicData>
         </a:graphic>
       </p:graphicFrame>
+      <p:pic>
+        <p:nvPicPr>
+          <p:cNvPr id="49" name="Picture 48" descr="card_w.png"/>
+          <p:cNvPicPr>
+            <a:picLocks noChangeAspect="1"/>
+          </p:cNvPicPr>
+          <p:nvPr/>
+        </p:nvPicPr>
+        <p:blipFill>
+          <a:blip r:embed="rId6"/>
+          <a:stretch>
+            <a:fillRect/>
+          </a:stretch>
+        </p:blipFill>
+        <p:spPr>
+          <a:xfrm>
+            <a:off x="10809817" y="1644650"/>
+            <a:ext cx="148167" cy="139700"/>
+          </a:xfrm>
+          <a:prstGeom prst="rect">
+            <a:avLst/>
+          </a:prstGeom>
+        </p:spPr>
+      </p:pic>
+      <p:pic>
+        <p:nvPicPr>
+          <p:cNvPr id="50" name="Picture 49" descr="people.png"/>
+          <p:cNvPicPr>
+            <a:picLocks noChangeAspect="1"/>
+          </p:cNvPicPr>
+          <p:nvPr/>
+        </p:nvPicPr>
+        <p:blipFill>
+          <a:blip r:embed="rId7"/>
+          <a:stretch>
+            <a:fillRect/>
+          </a:stretch>
+        </p:blipFill>
+        <p:spPr>
+          <a:xfrm>
+            <a:off x="9112250" y="1644650"/>
+            <a:ext cx="139700" cy="139700"/>
+          </a:xfrm>
+          <a:prstGeom prst="rect">
+            <a:avLst/>
+          </a:prstGeom>
+        </p:spPr>
+      </p:pic>
+      <p:pic>
+        <p:nvPicPr>
+          <p:cNvPr id="51" name="Picture 50" descr="percent.png"/>
+          <p:cNvPicPr>
+            <a:picLocks noChangeAspect="1"/>
+          </p:cNvPicPr>
+          <p:nvPr/>
+        </p:nvPicPr>
+        <p:blipFill>
+          <a:blip r:embed="rId8"/>
+          <a:stretch>
+            <a:fillRect/>
+          </a:stretch>
+        </p:blipFill>
+        <p:spPr>
+          <a:xfrm>
+            <a:off x="7880350" y="1644650"/>
+            <a:ext cx="139700" cy="139700"/>
+          </a:xfrm>
+          <a:prstGeom prst="rect">
+            <a:avLst/>
+          </a:prstGeom>
+        </p:spPr>
+      </p:pic>
+      <p:pic>
+        <p:nvPicPr>
+          <p:cNvPr id="52" name="Picture 51" descr="users.png"/>
+          <p:cNvPicPr>
+            <a:picLocks noChangeAspect="1"/>
+          </p:cNvPicPr>
+          <p:nvPr/>
+        </p:nvPicPr>
+        <p:blipFill>
+          <a:blip r:embed="rId9"/>
+          <a:stretch>
+            <a:fillRect/>
+          </a:stretch>
+        </p:blipFill>
+        <p:spPr>
+          <a:xfrm>
+            <a:off x="6700996" y="1644650"/>
+            <a:ext cx="136208" cy="139700"/>
+          </a:xfrm>
+          <a:prstGeom prst="rect">
+            <a:avLst/>
+          </a:prstGeom>
+        </p:spPr>
+      </p:pic>
+      <p:pic>
+        <p:nvPicPr>
+          <p:cNvPr id="53" name="Picture 52" descr="coins.png"/>
+          <p:cNvPicPr>
+            <a:picLocks noChangeAspect="1"/>
+          </p:cNvPicPr>
+          <p:nvPr/>
+        </p:nvPicPr>
+        <p:blipFill>
+          <a:blip r:embed="rId10"/>
+          <a:stretch>
+            <a:fillRect/>
+          </a:stretch>
+        </p:blipFill>
+        <p:spPr>
+          <a:xfrm>
+            <a:off x="5340350" y="1644650"/>
+            <a:ext cx="139700" cy="139700"/>
+          </a:xfrm>
+          <a:prstGeom prst="rect">
+            <a:avLst/>
+          </a:prstGeom>
+        </p:spPr>
+      </p:pic>
+      <p:pic>
+        <p:nvPicPr>
+          <p:cNvPr id="54" name="Picture 53" descr="repeat.png"/>
+          <p:cNvPicPr>
+            <a:picLocks noChangeAspect="1"/>
+          </p:cNvPicPr>
+          <p:nvPr/>
+        </p:nvPicPr>
+        <p:blipFill>
+          <a:blip r:embed="rId11"/>
+          <a:stretch>
+            <a:fillRect/>
+          </a:stretch>
+        </p:blipFill>
+        <p:spPr>
+          <a:xfrm>
+            <a:off x="4255135" y="1644650"/>
+            <a:ext cx="125730" cy="139700"/>
+          </a:xfrm>
+          <a:prstGeom prst="rect">
+            <a:avLst/>
+          </a:prstGeom>
+        </p:spPr>
+      </p:pic>
+      <p:pic>
+        <p:nvPicPr>
+          <p:cNvPr id="55" name="Picture 54" descr="bag.png"/>
+          <p:cNvPicPr>
+            <a:picLocks noChangeAspect="1"/>
+          </p:cNvPicPr>
+          <p:nvPr/>
+        </p:nvPicPr>
+        <p:blipFill>
+          <a:blip r:embed="rId12"/>
+          <a:stretch>
+            <a:fillRect/>
+          </a:stretch>
+        </p:blipFill>
+        <p:spPr>
+          <a:xfrm>
+            <a:off x="3127041" y="1644650"/>
+            <a:ext cx="121318" cy="139700"/>
+          </a:xfrm>
+          <a:prstGeom prst="rect">
+            <a:avLst/>
+          </a:prstGeom>
+        </p:spPr>
+      </p:pic>
+      <p:pic>
+        <p:nvPicPr>
+          <p:cNvPr id="56" name="Picture 55" descr="percent.png"/>
+          <p:cNvPicPr>
+            <a:picLocks noChangeAspect="1"/>
+          </p:cNvPicPr>
+          <p:nvPr/>
+        </p:nvPicPr>
+        <p:blipFill>
+          <a:blip r:embed="rId8"/>
+          <a:stretch>
+            <a:fillRect/>
+          </a:stretch>
+        </p:blipFill>
+        <p:spPr>
+          <a:xfrm>
+            <a:off x="1835150" y="1644650"/>
+            <a:ext cx="139700" cy="139700"/>
+          </a:xfrm>
+          <a:prstGeom prst="rect">
+            <a:avLst/>
+          </a:prstGeom>
+        </p:spPr>
+      </p:pic>
+      <p:pic>
+        <p:nvPicPr>
+          <p:cNvPr id="57" name="Picture 56" descr="calc.png"/>
+          <p:cNvPicPr>
+            <a:picLocks noChangeAspect="1"/>
+          </p:cNvPicPr>
+          <p:nvPr/>
+        </p:nvPicPr>
+        <p:blipFill>
+          <a:blip r:embed="rId13"/>
+          <a:stretch>
+            <a:fillRect/>
+          </a:stretch>
+        </p:blipFill>
+        <p:spPr>
+          <a:xfrm>
+            <a:off x="779677" y="1644650"/>
+            <a:ext cx="117046" cy="139700"/>
+          </a:xfrm>
+          <a:prstGeom prst="rect">
+            <a:avLst/>
+          </a:prstGeom>
+        </p:spPr>
+      </p:pic>
+      <p:pic>
+        <p:nvPicPr>
+          <p:cNvPr id="58" name="Picture 57" descr="person.png"/>
+          <p:cNvPicPr>
+            <a:picLocks noChangeAspect="1"/>
+          </p:cNvPicPr>
+          <p:nvPr/>
+        </p:nvPicPr>
+        <p:blipFill>
+          <a:blip r:embed="rId14"/>
+          <a:stretch>
+            <a:fillRect/>
+          </a:stretch>
+        </p:blipFill>
+        <p:spPr>
+          <a:xfrm>
+            <a:off x="11613493" y="2349500"/>
+            <a:ext cx="115614" cy="139700"/>
+          </a:xfrm>
+          <a:prstGeom prst="rect">
+            <a:avLst/>
+          </a:prstGeom>
+        </p:spPr>
+      </p:pic>
+      <p:pic>
+        <p:nvPicPr>
+          <p:cNvPr id="59" name="Picture 58" descr="person.png"/>
+          <p:cNvPicPr>
+            <a:picLocks noChangeAspect="1"/>
+          </p:cNvPicPr>
+          <p:nvPr/>
+        </p:nvPicPr>
+        <p:blipFill>
+          <a:blip r:embed="rId14"/>
+          <a:stretch>
+            <a:fillRect/>
+          </a:stretch>
+        </p:blipFill>
+        <p:spPr>
+          <a:xfrm>
+            <a:off x="11613493" y="2590800"/>
+            <a:ext cx="115614" cy="139700"/>
+          </a:xfrm>
+          <a:prstGeom prst="rect">
+            <a:avLst/>
+          </a:prstGeom>
+        </p:spPr>
+      </p:pic>
+      <p:pic>
+        <p:nvPicPr>
+          <p:cNvPr id="60" name="Picture 59" descr="person.png"/>
+          <p:cNvPicPr>
+            <a:picLocks noChangeAspect="1"/>
+          </p:cNvPicPr>
+          <p:nvPr/>
+        </p:nvPicPr>
+        <p:blipFill>
+          <a:blip r:embed="rId14"/>
+          <a:stretch>
+            <a:fillRect/>
+          </a:stretch>
+        </p:blipFill>
+        <p:spPr>
+          <a:xfrm>
+            <a:off x="11613493" y="2832100"/>
+            <a:ext cx="115614" cy="139700"/>
+          </a:xfrm>
+          <a:prstGeom prst="rect">
+            <a:avLst/>
+          </a:prstGeom>
+        </p:spPr>
+      </p:pic>
+      <p:pic>
+        <p:nvPicPr>
+          <p:cNvPr id="61" name="Picture 60" descr="calc.png"/>
+          <p:cNvPicPr>
+            <a:picLocks noChangeAspect="1"/>
+          </p:cNvPicPr>
+          <p:nvPr/>
+        </p:nvPicPr>
+        <p:blipFill>
+          <a:blip r:embed="rId13"/>
+          <a:stretch>
+            <a:fillRect/>
+          </a:stretch>
+        </p:blipFill>
+        <p:spPr>
+          <a:xfrm>
+            <a:off x="11594757" y="3079750"/>
+            <a:ext cx="127686" cy="152400"/>
+          </a:xfrm>
+          <a:prstGeom prst="rect">
+            <a:avLst/>
+          </a:prstGeom>
+        </p:spPr>
+      </p:pic>
+      <p:pic>
+        <p:nvPicPr>
+          <p:cNvPr id="62" name="Picture 61" descr="person.png"/>
+          <p:cNvPicPr>
+            <a:picLocks noChangeAspect="1"/>
+          </p:cNvPicPr>
+          <p:nvPr/>
+        </p:nvPicPr>
+        <p:blipFill>
+          <a:blip r:embed="rId14"/>
+          <a:stretch>
+            <a:fillRect/>
+          </a:stretch>
+        </p:blipFill>
+        <p:spPr>
+          <a:xfrm>
+            <a:off x="11613493" y="3594100"/>
+            <a:ext cx="115614" cy="139700"/>
+          </a:xfrm>
+          <a:prstGeom prst="rect">
+            <a:avLst/>
+          </a:prstGeom>
+        </p:spPr>
+      </p:pic>
+      <p:pic>
+        <p:nvPicPr>
+          <p:cNvPr id="63" name="Picture 62" descr="person.png"/>
+          <p:cNvPicPr>
+            <a:picLocks noChangeAspect="1"/>
+          </p:cNvPicPr>
+          <p:nvPr/>
+        </p:nvPicPr>
+        <p:blipFill>
+          <a:blip r:embed="rId14"/>
+          <a:stretch>
+            <a:fillRect/>
+          </a:stretch>
+        </p:blipFill>
+        <p:spPr>
+          <a:xfrm>
+            <a:off x="11613493" y="3835400"/>
+            <a:ext cx="115614" cy="139700"/>
+          </a:xfrm>
+          <a:prstGeom prst="rect">
+            <a:avLst/>
+          </a:prstGeom>
+        </p:spPr>
+      </p:pic>
+      <p:pic>
+        <p:nvPicPr>
+          <p:cNvPr id="64" name="Picture 63" descr="person.png"/>
+          <p:cNvPicPr>
+            <a:picLocks noChangeAspect="1"/>
+          </p:cNvPicPr>
+          <p:nvPr/>
+        </p:nvPicPr>
+        <p:blipFill>
+          <a:blip r:embed="rId14"/>
+          <a:stretch>
+            <a:fillRect/>
+          </a:stretch>
+        </p:blipFill>
+        <p:spPr>
+          <a:xfrm>
+            <a:off x="11613493" y="4076700"/>
+            <a:ext cx="115614" cy="139700"/>
+          </a:xfrm>
+          <a:prstGeom prst="rect">
+            <a:avLst/>
+          </a:prstGeom>
+        </p:spPr>
+      </p:pic>
+      <p:pic>
+        <p:nvPicPr>
+          <p:cNvPr id="65" name="Picture 64" descr="calc.png"/>
+          <p:cNvPicPr>
+            <a:picLocks noChangeAspect="1"/>
+          </p:cNvPicPr>
+          <p:nvPr/>
+        </p:nvPicPr>
+        <p:blipFill>
+          <a:blip r:embed="rId13"/>
+          <a:stretch>
+            <a:fillRect/>
+          </a:stretch>
+        </p:blipFill>
+        <p:spPr>
+          <a:xfrm>
+            <a:off x="11594757" y="4324350"/>
+            <a:ext cx="127686" cy="152400"/>
+          </a:xfrm>
+          <a:prstGeom prst="rect">
+            <a:avLst/>
+          </a:prstGeom>
+        </p:spPr>
+      </p:pic>
+      <p:pic>
+        <p:nvPicPr>
+          <p:cNvPr id="66" name="Picture 65" descr="person.png"/>
+          <p:cNvPicPr>
+            <a:picLocks noChangeAspect="1"/>
+          </p:cNvPicPr>
+          <p:nvPr/>
+        </p:nvPicPr>
+        <p:blipFill>
+          <a:blip r:embed="rId14"/>
+          <a:stretch>
+            <a:fillRect/>
+          </a:stretch>
+        </p:blipFill>
+        <p:spPr>
+          <a:xfrm>
+            <a:off x="11613493" y="4838700"/>
+            <a:ext cx="115614" cy="139700"/>
+          </a:xfrm>
+          <a:prstGeom prst="rect">
+            <a:avLst/>
+          </a:prstGeom>
+        </p:spPr>
+      </p:pic>
+      <p:pic>
+        <p:nvPicPr>
+          <p:cNvPr id="67" name="Picture 66" descr="person.png"/>
+          <p:cNvPicPr>
+            <a:picLocks noChangeAspect="1"/>
+          </p:cNvPicPr>
+          <p:nvPr/>
+        </p:nvPicPr>
+        <p:blipFill>
+          <a:blip r:embed="rId14"/>
+          <a:stretch>
+            <a:fillRect/>
+          </a:stretch>
+        </p:blipFill>
+        <p:spPr>
+          <a:xfrm>
+            <a:off x="11613493" y="5080000"/>
+            <a:ext cx="115614" cy="139700"/>
+          </a:xfrm>
+          <a:prstGeom prst="rect">
+            <a:avLst/>
+          </a:prstGeom>
+        </p:spPr>
+      </p:pic>
+      <p:pic>
+        <p:nvPicPr>
+          <p:cNvPr id="68" name="Picture 67" descr="person.png"/>
+          <p:cNvPicPr>
+            <a:picLocks noChangeAspect="1"/>
+          </p:cNvPicPr>
+          <p:nvPr/>
+        </p:nvPicPr>
+        <p:blipFill>
+          <a:blip r:embed="rId14"/>
+          <a:stretch>
+            <a:fillRect/>
+          </a:stretch>
+        </p:blipFill>
+        <p:spPr>
+          <a:xfrm>
+            <a:off x="11613493" y="5321300"/>
+            <a:ext cx="115614" cy="139700"/>
+          </a:xfrm>
+          <a:prstGeom prst="rect">
+            <a:avLst/>
+          </a:prstGeom>
+        </p:spPr>
+      </p:pic>
+      <p:pic>
+        <p:nvPicPr>
+          <p:cNvPr id="69" name="Picture 68" descr="calc.png"/>
+          <p:cNvPicPr>
+            <a:picLocks noChangeAspect="1"/>
+          </p:cNvPicPr>
+          <p:nvPr/>
+        </p:nvPicPr>
+        <p:blipFill>
+          <a:blip r:embed="rId13"/>
+          <a:stretch>
+            <a:fillRect/>
+          </a:stretch>
+        </p:blipFill>
+        <p:spPr>
+          <a:xfrm>
+            <a:off x="11594757" y="5568950"/>
+            <a:ext cx="127686" cy="152400"/>
+          </a:xfrm>
+          <a:prstGeom prst="rect">
+            <a:avLst/>
+          </a:prstGeom>
+        </p:spPr>
+      </p:pic>
       <p:sp>
         <p:nvSpPr>
-          <p:cNvPr id="48" name="TextBox 47"/>
+          <p:cNvPr id="70" name="TextBox 69"/>
           <p:cNvSpPr txBox="1"/>
           <p:nvPr/>
         </p:nvSpPr>
@@ -10950,7 +11170,7 @@
       </p:sp>
       <p:sp>
         <p:nvSpPr>
-          <p:cNvPr id="49" name="TextBox 48"/>
+          <p:cNvPr id="71" name="TextBox 70"/>
           <p:cNvSpPr txBox="1"/>
           <p:nvPr/>
         </p:nvSpPr>
@@ -11009,7 +11229,7 @@
       </p:sp>
       <p:sp>
         <p:nvSpPr>
-          <p:cNvPr id="50" name="TextBox 49"/>
+          <p:cNvPr id="72" name="TextBox 71"/>
           <p:cNvSpPr txBox="1"/>
           <p:nvPr/>
         </p:nvSpPr>
@@ -11068,7 +11288,7 @@
       </p:sp>
       <p:sp>
         <p:nvSpPr>
-          <p:cNvPr id="51" name="Rounded Rectangle 50"/>
+          <p:cNvPr id="73" name="Rounded Rectangle 72"/>
           <p:cNvSpPr/>
           <p:nvPr/>
         </p:nvSpPr>
@@ -11100,46 +11320,33 @@
           </a:p>
         </p:txBody>
       </p:sp>
-      <p:sp>
-        <p:nvSpPr>
-          <p:cNvPr id="52" name="TextBox 51"/>
-          <p:cNvSpPr txBox="1"/>
+      <p:pic>
+        <p:nvPicPr>
+          <p:cNvPr id="74" name="Picture 73" descr="repeat_b.png"/>
+          <p:cNvPicPr>
+            <a:picLocks noChangeAspect="1"/>
+          </p:cNvPicPr>
           <p:nvPr/>
-        </p:nvSpPr>
+        </p:nvPicPr>
+        <p:blipFill>
+          <a:blip r:embed="rId15"/>
+          <a:stretch>
+            <a:fillRect/>
+          </a:stretch>
+        </p:blipFill>
         <p:spPr>
           <a:xfrm>
-            <a:off x="11404600" y="5867400"/>
-            <a:ext cx="330200" cy="381000"/>
+            <a:off x="11489690" y="5969000"/>
+            <a:ext cx="160020" cy="177800"/>
           </a:xfrm>
           <a:prstGeom prst="rect">
             <a:avLst/>
           </a:prstGeom>
-          <a:noFill/>
         </p:spPr>
-        <p:txBody>
-          <a:bodyPr wrap="none" lIns="0" rIns="0" tIns="0" bIns="0" anchor="ctr">
-            <a:noAutofit/>
-          </a:bodyPr>
-          <a:lstStyle/>
-          <a:p>
-            <a:pPr rtl="1" algn="ctr"/>
-            <a:r>
-              <a:rPr sz="1200" b="0" lang="fa-IR">
-                <a:solidFill>
-                  <a:srgbClr val="0D67C1"/>
-                </a:solidFill>
-                <a:latin typeface="Segoe UI Emoji"/>
-                <a:cs typeface="Segoe UI Emoji"/>
-                <a:ea typeface="Segoe UI Emoji"/>
-              </a:rPr>
-              <a:t>🔁</a:t>
-            </a:r>
-          </a:p>
-        </p:txBody>
-      </p:sp>
+      </p:pic>
       <p:sp>
         <p:nvSpPr>
-          <p:cNvPr id="53" name="TextBox 52"/>
+          <p:cNvPr id="75" name="TextBox 74"/>
           <p:cNvSpPr txBox="1"/>
           <p:nvPr/>
         </p:nvSpPr>
@@ -11176,7 +11383,7 @@
       </p:sp>
       <p:sp>
         <p:nvSpPr>
-          <p:cNvPr id="54" name="TextBox 53"/>
+          <p:cNvPr id="76" name="TextBox 75"/>
           <p:cNvSpPr txBox="1"/>
           <p:nvPr/>
         </p:nvSpPr>
@@ -11202,15 +11409,15 @@
               </a:lnSpc>
             </a:pPr>
             <a:r>
-              <a:rPr sz="750" b="0" lang="fa-IR">
+              <a:rPr sz="100" b="0" lang="fa-IR">
                 <a:solidFill>
                   <a:srgbClr val="6E88B4"/>
                 </a:solidFill>
-                <a:latin typeface="Segoe UI Emoji"/>
-                <a:cs typeface="Segoe UI Emoji"/>
-                <a:ea typeface="Segoe UI Emoji"/>
+                <a:latin typeface="IRANSansXFaNum"/>
+                <a:cs typeface="IRANSansXFaNum"/>
+                <a:ea typeface="IRANSansXFaNum"/>
               </a:rPr>
-              <a:t>⚠️  </a:t>
+              <a:t/>
             </a:r>
             <a:r>
               <a:rPr sz="750" b="0" lang="fa-IR">
